--- a/materials/pdf/original/DS08_Folien_Raten-erlaubt.pptx
+++ b/materials/pdf/original/DS08_Folien_Raten-erlaubt.pptx
@@ -124,19 +124,19 @@
   <p:extLst>
     <p:ext uri="{521415D9-36F7-43E2-AB2F-B90AF26B5E84}">
       <p14:sectionLst xmlns:p14="http://schemas.microsoft.com/office/powerpoint/2010/main">
-        <p14:section name="Start" id="{d8e11249-30ea-e6b3-5bd6-33cfaae0766a}">
+        <p14:section name="Start" id="{54f3d513-a86a-cc4c-40fd-52e71111454c}">
           <p14:sldIdLst>
             <p14:sldId id="256"/>
           </p14:sldIdLst>
         </p14:section>
-        <p14:section name="Einstieg" id="{dbf5c95f-5492-c371-b88e-9a608b8d17a9}">
+        <p14:section name="Einstieg" id="{947d9552-6dc9-3ccd-df0c-c028ae3120ee}">
           <p14:sldIdLst>
             <p14:sldId id="257"/>
             <p14:sldId id="258"/>
             <p14:sldId id="259"/>
           </p14:sldIdLst>
         </p14:section>
-        <p14:section name="Erarbeitung" id="{825cd85c-5523-ba87-b7c0-a2e1b3621b17}">
+        <p14:section name="Erarbeitung" id="{b26e7778-d58b-b6a2-93fd-d05157508054}">
           <p14:sldIdLst>
             <p14:sldId id="260"/>
             <p14:sldId id="261"/>
@@ -148,20 +148,20 @@
             <p14:sldId id="267"/>
           </p14:sldIdLst>
         </p14:section>
-        <p14:section name="Übung" id="{1e919c1f-3d71-615b-761f-cf2a93f2c364}">
+        <p14:section name="Übung" id="{82af396a-f357-80fc-bf9b-618fbc7bf387}">
           <p14:sldIdLst>
             <p14:sldId id="268"/>
             <p14:sldId id="269"/>
             <p14:sldId id="270"/>
           </p14:sldIdLst>
         </p14:section>
-        <p14:section name="Sicherung" id="{fc753a76-408f-2207-942e-ba6296b0b8f4}">
+        <p14:section name="Sicherung" id="{2442b10c-e918-c892-49c7-4a4feadd62fd}">
           <p14:sldIdLst>
             <p14:sldId id="271"/>
             <p14:sldId id="272"/>
           </p14:sldIdLst>
         </p14:section>
-        <p14:section name="Abschluss" id="{77e322ab-1e69-f11b-2667-b7dbe88e81a3}">
+        <p14:section name="Abschluss" id="{0cec37f1-01d4-ec9a-3ff4-72329ddc362d}">
           <p14:sldIdLst>
             <p14:sldId id="273"/>
           </p14:sldIdLst>
@@ -834,7 +834,7 @@
           <a:p>
             <a:r>
               <a:rPr lang="en-US" dirty="0"/>
-              <a:t>Tabelle gemeinsam: {S0}: a → {S0,S1}, b → {S0}; {S0,S1}: a → {S0,S1}, b → {S0,S2}; {S0,S2}: a → {S0,S1}, b → {S0}. Endzustand: {S0,S2}.</a:t>
+              <a:t>[NUR LEHRKRAFT] Tabelle gemeinsam: {S0}: a → {S0,S1}, b → {S0}; {S0,S1}: a → {S0,S1}, b → {S0,S2}; {S0,S2}: a → {S0,S1}, b → {S0}. Endzustand: {S0,S2}.</a:t>
             </a:r>
             <a:endParaRPr lang="en-US" dirty="0"/>
           </a:p>
@@ -1890,7 +1890,7 @@
           <a:p>
             <a:r>
               <a:rPr lang="en-US" dirty="0"/>
-              <a:t>Nach dem letzten L liegt eine Münze auf S3 ⇒ akzeptiert. Die Mengen sind die Zustände, in denen der NEA „gleichzeitig“ ist.</a:t>
+              <a:t>[NUR LEHRKRAFT] Nach dem letzten L liegt eine Münze auf S3 ⇒ akzeptiert. Die Mengen sind die Zustände, in denen der NEA „gleichzeitig“ ist.</a:t>
             </a:r>
             <a:endParaRPr lang="en-US" dirty="0"/>
           </a:p>
@@ -1978,7 +1978,7 @@
           <a:p>
             <a:r>
               <a:rPr lang="en-US" dirty="0"/>
-              <a:t>Keine Münze auf S3 ⇒ abgelehnt. Beim zweiten O scheidet die Münze aus S2 aus; S0 bleibt immer belegt.</a:t>
+              <a:t>[NUR LEHRKRAFT] Keine Münze auf S3 ⇒ abgelehnt. Beim zweiten O scheidet die Münze aus S2 aus; S0 bleibt immer belegt.</a:t>
             </a:r>
             <a:endParaRPr lang="en-US" dirty="0"/>
           </a:p>

--- a/materials/pdf/original/DS08_Folien_Raten-erlaubt.pptx
+++ b/materials/pdf/original/DS08_Folien_Raten-erlaubt.pptx
@@ -124,19 +124,19 @@
   <p:extLst>
     <p:ext uri="{521415D9-36F7-43E2-AB2F-B90AF26B5E84}">
       <p14:sectionLst xmlns:p14="http://schemas.microsoft.com/office/powerpoint/2010/main">
-        <p14:section name="Start" id="{54f3d513-a86a-cc4c-40fd-52e71111454c}">
+        <p14:section name="Start" id="{501c59ad-e9cd-2c90-53cc-ab37d26a9a18}">
           <p14:sldIdLst>
             <p14:sldId id="256"/>
           </p14:sldIdLst>
         </p14:section>
-        <p14:section name="Einstieg" id="{947d9552-6dc9-3ccd-df0c-c028ae3120ee}">
+        <p14:section name="Einstieg" id="{48d58c08-5a0b-bb4d-326a-0d9b15ef75ff}">
           <p14:sldIdLst>
             <p14:sldId id="257"/>
             <p14:sldId id="258"/>
             <p14:sldId id="259"/>
           </p14:sldIdLst>
         </p14:section>
-        <p14:section name="Erarbeitung" id="{b26e7778-d58b-b6a2-93fd-d05157508054}">
+        <p14:section name="Erarbeitung" id="{1eb85785-cc8f-89b7-4e79-b818edbe8c06}">
           <p14:sldIdLst>
             <p14:sldId id="260"/>
             <p14:sldId id="261"/>
@@ -148,20 +148,20 @@
             <p14:sldId id="267"/>
           </p14:sldIdLst>
         </p14:section>
-        <p14:section name="Übung" id="{82af396a-f357-80fc-bf9b-618fbc7bf387}">
+        <p14:section name="Übung" id="{0b3ccfba-9381-178a-f4d1-c771be4ecf70}">
           <p14:sldIdLst>
             <p14:sldId id="268"/>
             <p14:sldId id="269"/>
             <p14:sldId id="270"/>
           </p14:sldIdLst>
         </p14:section>
-        <p14:section name="Sicherung" id="{2442b10c-e918-c892-49c7-4a4feadd62fd}">
+        <p14:section name="Sicherung" id="{8937d36f-e001-3e77-de22-fa3ef2bffec8}">
           <p14:sldIdLst>
             <p14:sldId id="271"/>
             <p14:sldId id="272"/>
           </p14:sldIdLst>
         </p14:section>
-        <p14:section name="Abschluss" id="{0cec37f1-01d4-ec9a-3ff4-72329ddc362d}">
+        <p14:section name="Abschluss" id="{7ab14eac-e123-d93e-3f7e-b37a9a882e07}">
           <p14:sldIdLst>
             <p14:sldId id="273"/>
           </p14:sldIdLst>
@@ -2393,6 +2393,45 @@
       </p:sp>
       <p:sp>
         <p:nvSpPr>
+          <p:cNvPr id="4" name="Text 1"/>
+          <p:cNvSpPr/>
+          <p:nvPr/>
+        </p:nvSpPr>
+        <p:spPr>
+          <a:xfrm>
+            <a:off x="7985455" y="6473952"/>
+            <a:ext cx="2926080" cy="274320"/>
+          </a:xfrm>
+          <a:prstGeom prst="rect">
+            <a:avLst/>
+          </a:prstGeom>
+          <a:noFill/>
+          <a:ln/>
+        </p:spPr>
+        <p:txBody>
+          <a:bodyPr wrap="square" lIns="0" tIns="0" rIns="0" bIns="0" rtlCol="0" anchor="ctr"/>
+          <a:lstStyle/>
+          <a:p>
+            <a:pPr algn="r" indent="0" marL="0">
+              <a:buNone/>
+            </a:pPr>
+            <a:r>
+              <a:rPr lang="en-US" sz="1100" dirty="0">
+                <a:solidFill>
+                  <a:srgbClr val="5B6770"/>
+                </a:solidFill>
+                <a:latin typeface="Calibri" pitchFamily="34" charset="0"/>
+                <a:ea typeface="Calibri" pitchFamily="34" charset="-122"/>
+                <a:cs typeface="Calibri" pitchFamily="34" charset="-120"/>
+              </a:rPr>
+              <a:t>CC BY-SA 4.0 · Frank Juchim</a:t>
+            </a:r>
+            <a:endParaRPr lang="en-US" sz="1100" dirty="0"/>
+          </a:p>
+        </p:txBody>
+      </p:sp>
+      <p:sp>
+        <p:nvSpPr>
           <p:cNvPr id="25" name="Slide Number Placeholder 0"/>
           <p:cNvSpPr>
             <a:spLocks noGrp="1"/>
@@ -2544,6 +2583,45 @@
                 <a:cs typeface="Calibri" pitchFamily="34" charset="-120"/>
               </a:rPr>
               <a:t>Level 8 · Welt B · Grenzen &amp; Keller · Zusatz (über das KC hinaus)</a:t>
+            </a:r>
+            <a:endParaRPr lang="en-US" sz="1100" dirty="0"/>
+          </a:p>
+        </p:txBody>
+      </p:sp>
+      <p:sp>
+        <p:nvSpPr>
+          <p:cNvPr id="4" name="Text 1"/>
+          <p:cNvSpPr/>
+          <p:nvPr/>
+        </p:nvSpPr>
+        <p:spPr>
+          <a:xfrm>
+            <a:off x="7985455" y="6473952"/>
+            <a:ext cx="2926080" cy="274320"/>
+          </a:xfrm>
+          <a:prstGeom prst="rect">
+            <a:avLst/>
+          </a:prstGeom>
+          <a:noFill/>
+          <a:ln/>
+        </p:spPr>
+        <p:txBody>
+          <a:bodyPr wrap="square" lIns="0" tIns="0" rIns="0" bIns="0" rtlCol="0" anchor="ctr"/>
+          <a:lstStyle/>
+          <a:p>
+            <a:pPr algn="r" indent="0" marL="0">
+              <a:buNone/>
+            </a:pPr>
+            <a:r>
+              <a:rPr lang="en-US" sz="1100" dirty="0">
+                <a:solidFill>
+                  <a:srgbClr val="5B6770"/>
+                </a:solidFill>
+                <a:latin typeface="Calibri" pitchFamily="34" charset="0"/>
+                <a:ea typeface="Calibri" pitchFamily="34" charset="-122"/>
+                <a:cs typeface="Calibri" pitchFamily="34" charset="-120"/>
+              </a:rPr>
+              <a:t>CC BY-SA 4.0 · Frank Juchim</a:t>
             </a:r>
             <a:endParaRPr lang="en-US" sz="1100" dirty="0"/>
           </a:p>
